--- a/Dokumentation/Präsentationen/DS_Statusmeeting_1.0.pptx
+++ b/Dokumentation/Präsentationen/DS_Statusmeeting_1.0.pptx
@@ -18366,7 +18366,7 @@
             </a:r>
             <a:r>
               <a:rPr lang="de-DE" dirty="0"/>
-              <a:t>Admin-Controller, Gruppen-System (UserGroup), Protokoll-Verwaltung</a:t>
+              <a:t>Globales Exception Handling mit strukturierten Fehlermeldungen</a:t>
             </a:r>
           </a:p>
           <a:p>
@@ -18375,12 +18375,16 @@
               <a:buChar char="•"/>
             </a:pPr>
             <a:r>
+              <a:rPr lang="de-DE" b="1" dirty="0" err="1"/>
+              <a:t>WebApp</a:t>
+            </a:r>
+            <a:r>
               <a:rPr lang="de-DE" b="1" dirty="0"/>
-              <a:t>Backend: </a:t>
+              <a:t>: </a:t>
             </a:r>
             <a:r>
               <a:rPr lang="de-DE" dirty="0"/>
-              <a:t>Globales Exception Handling mit strukturierten Fehlermeldungen</a:t>
+              <a:t>Fahrten- und Fahrzeugtabelle laden Daten vom Backend</a:t>
             </a:r>
           </a:p>
           <a:p>
@@ -18389,12 +18393,16 @@
               <a:buChar char="•"/>
             </a:pPr>
             <a:r>
+              <a:rPr lang="de-DE" b="1" dirty="0" err="1"/>
+              <a:t>WebApp</a:t>
+            </a:r>
+            <a:r>
               <a:rPr lang="de-DE" b="1" dirty="0"/>
-              <a:t>WebApp: </a:t>
+              <a:t>: </a:t>
             </a:r>
             <a:r>
               <a:rPr lang="de-DE" dirty="0"/>
-              <a:t>Auth-Flow (Login → Profilauswahl → Dashboard) strukturell fertig</a:t>
+              <a:t>Google Maps Kartenansicht integriert</a:t>
             </a:r>
           </a:p>
           <a:p>
@@ -18403,26 +18411,16 @@
               <a:buChar char="•"/>
             </a:pPr>
             <a:r>
+              <a:rPr lang="de-DE" b="1" dirty="0" err="1"/>
+              <a:t>WebApp</a:t>
+            </a:r>
+            <a:r>
               <a:rPr lang="de-DE" b="1" dirty="0"/>
-              <a:t>WebApp: </a:t>
+              <a:t>: </a:t>
             </a:r>
             <a:r>
               <a:rPr lang="de-DE" dirty="0"/>
-              <a:t>Fahrten- und Fahrzeugtabelle laden Daten vom Backend</a:t>
-            </a:r>
-          </a:p>
-          <a:p>
-            <a:pPr marL="342900" indent="-342900">
-              <a:buFont typeface="Arial" panose="020B0604020202020204" pitchFamily="34" charset="0"/>
-              <a:buChar char="•"/>
-            </a:pPr>
-            <a:r>
-              <a:rPr lang="de-DE" b="1" dirty="0"/>
-              <a:t>WebApp: </a:t>
-            </a:r>
-            <a:r>
-              <a:rPr lang="de-DE" dirty="0"/>
-              <a:t>Google Maps Kartenansicht integriert</a:t>
+              <a:t>Auth-Flow (Login → Profilauswahl → Dashboard)</a:t>
             </a:r>
           </a:p>
           <a:p>
@@ -18436,8 +18434,39 @@
             </a:r>
             <a:r>
               <a:rPr lang="de-DE" dirty="0"/>
-              <a:t>Grundgerüst aufgesetzt, GPS-Tracking in Entwicklung</a:t>
+              <a:t>Registrierung und Login</a:t>
             </a:r>
+            <a:endParaRPr lang="de-DE" b="1" dirty="0"/>
+          </a:p>
+          <a:p>
+            <a:pPr marL="342900" indent="-342900">
+              <a:buFont typeface="Arial" panose="020B0604020202020204" pitchFamily="34" charset="0"/>
+              <a:buChar char="•"/>
+            </a:pPr>
+            <a:r>
+              <a:rPr lang="de-DE" b="1" dirty="0"/>
+              <a:t>Mobile App: </a:t>
+            </a:r>
+            <a:r>
+              <a:rPr lang="de-DE" dirty="0"/>
+              <a:t>Grundgerüst für Benutzeroberfläche aufgesetzt</a:t>
+            </a:r>
+            <a:endParaRPr lang="de-DE" b="1" dirty="0"/>
+          </a:p>
+          <a:p>
+            <a:pPr marL="342900" indent="-342900">
+              <a:buFont typeface="Arial" panose="020B0604020202020204" pitchFamily="34" charset="0"/>
+              <a:buChar char="•"/>
+            </a:pPr>
+            <a:r>
+              <a:rPr lang="de-DE" b="1" dirty="0"/>
+              <a:t>Mobile App: </a:t>
+            </a:r>
+            <a:r>
+              <a:rPr lang="de-DE" dirty="0"/>
+              <a:t>GPS-Tracking und Speichern von Fahrten implementiert + lokaler Zwischenspeicherung</a:t>
+            </a:r>
+            <a:endParaRPr lang="de-DE" b="1" dirty="0"/>
           </a:p>
         </p:txBody>
       </p:sp>
@@ -20407,35 +20436,6 @@
 </file>
 
 <file path=customXml/item1.xml><?xml version="1.0" encoding="utf-8"?>
-<?mso-contentType ?>
-<FormTemplates xmlns="http://schemas.microsoft.com/sharepoint/v3/contenttype/forms">
-  <Display>DocumentLibraryForm</Display>
-  <Edit>DocumentLibraryForm</Edit>
-  <New>DocumentLibraryForm</New>
-</FormTemplates>
-</file>
-
-<file path=customXml/item2.xml><?xml version="1.0" encoding="utf-8"?>
-<p:properties xmlns:p="http://schemas.microsoft.com/office/2006/metadata/properties" xmlns:xsi="http://www.w3.org/2001/XMLSchema-instance" xmlns:pc="http://schemas.microsoft.com/office/infopath/2007/PartnerControls">
-  <documentManagement>
-    <_ip_UnifiedCompliancePolicyUIAction xmlns="http://schemas.microsoft.com/sharepoint/v3" xsi:nil="true"/>
-    <Image xmlns="71af3243-3dd4-4a8d-8c0d-dd76da1f02a5">
-      <Url xsi:nil="true"/>
-      <Description xsi:nil="true"/>
-    </Image>
-    <Status xmlns="71af3243-3dd4-4a8d-8c0d-dd76da1f02a5">Not started</Status>
-    <Background xmlns="71af3243-3dd4-4a8d-8c0d-dd76da1f02a5">false</Background>
-    <_ip_UnifiedCompliancePolicyProperties xmlns="http://schemas.microsoft.com/sharepoint/v3" xsi:nil="true"/>
-    <ImageTagsTaxHTField xmlns="71af3243-3dd4-4a8d-8c0d-dd76da1f02a5">
-      <Terms xmlns="http://schemas.microsoft.com/office/infopath/2007/PartnerControls"/>
-    </ImageTagsTaxHTField>
-    <TaxCatchAll xmlns="230e9df3-be65-4c73-a93b-d1236ebd677e" xsi:nil="true"/>
-    <MediaServiceKeyPoints xmlns="71af3243-3dd4-4a8d-8c0d-dd76da1f02a5" xsi:nil="true"/>
-  </documentManagement>
-</p:properties>
-</file>
-
-<file path=customXml/item3.xml><?xml version="1.0" encoding="utf-8"?>
 <ct:contentTypeSchema xmlns:ct="http://schemas.microsoft.com/office/2006/metadata/contentType" xmlns:ma="http://schemas.microsoft.com/office/2006/metadata/properties/metaAttributes" ct:_="" ma:_="" ma:contentTypeName="Document" ma:contentTypeID="0x01010079F111ED35F8CC479449609E8A0923A6" ma:contentTypeVersion="28" ma:contentTypeDescription="Create a new document." ma:contentTypeScope="" ma:versionID="60f5a4f2d2b0abadcf532d48ebf9cb71">
   <xsd:schema xmlns:xsd="http://www.w3.org/2001/XMLSchema" xmlns:xs="http://www.w3.org/2001/XMLSchema" xmlns:p="http://schemas.microsoft.com/office/2006/metadata/properties" xmlns:ns1="http://schemas.microsoft.com/sharepoint/v3" xmlns:ns2="71af3243-3dd4-4a8d-8c0d-dd76da1f02a5" xmlns:ns3="16c05727-aa75-4e4a-9b5f-8a80a1165891" xmlns:ns4="230e9df3-be65-4c73-a93b-d1236ebd677e" targetNamespace="http://schemas.microsoft.com/office/2006/metadata/properties" ma:root="true" ma:fieldsID="7dd78129e6a1811f84807ad11c651531" ns1:_="" ns2:_="" ns3:_="" ns4:_="">
     <xsd:import namespace="http://schemas.microsoft.com/sharepoint/v3"/>
@@ -20747,27 +20747,36 @@
 </ct:contentTypeSchema>
 </file>
 
-<file path=customXml/itemProps1.xml><?xml version="1.0" encoding="utf-8"?>
-<ds:datastoreItem xmlns:ds="http://schemas.openxmlformats.org/officeDocument/2006/customXml" ds:itemID="{16DBB56F-4362-4386-A1A1-3DF898896616}">
-  <ds:schemaRefs>
-    <ds:schemaRef ds:uri="http://schemas.microsoft.com/sharepoint/v3/contenttype/forms"/>
-  </ds:schemaRefs>
-</ds:datastoreItem>
+<file path=customXml/item2.xml><?xml version="1.0" encoding="utf-8"?>
+<p:properties xmlns:p="http://schemas.microsoft.com/office/2006/metadata/properties" xmlns:xsi="http://www.w3.org/2001/XMLSchema-instance" xmlns:pc="http://schemas.microsoft.com/office/infopath/2007/PartnerControls">
+  <documentManagement>
+    <_ip_UnifiedCompliancePolicyUIAction xmlns="http://schemas.microsoft.com/sharepoint/v3" xsi:nil="true"/>
+    <Image xmlns="71af3243-3dd4-4a8d-8c0d-dd76da1f02a5">
+      <Url xsi:nil="true"/>
+      <Description xsi:nil="true"/>
+    </Image>
+    <Status xmlns="71af3243-3dd4-4a8d-8c0d-dd76da1f02a5">Not started</Status>
+    <Background xmlns="71af3243-3dd4-4a8d-8c0d-dd76da1f02a5">false</Background>
+    <_ip_UnifiedCompliancePolicyProperties xmlns="http://schemas.microsoft.com/sharepoint/v3" xsi:nil="true"/>
+    <ImageTagsTaxHTField xmlns="71af3243-3dd4-4a8d-8c0d-dd76da1f02a5">
+      <Terms xmlns="http://schemas.microsoft.com/office/infopath/2007/PartnerControls"/>
+    </ImageTagsTaxHTField>
+    <TaxCatchAll xmlns="230e9df3-be65-4c73-a93b-d1236ebd677e" xsi:nil="true"/>
+    <MediaServiceKeyPoints xmlns="71af3243-3dd4-4a8d-8c0d-dd76da1f02a5" xsi:nil="true"/>
+  </documentManagement>
+</p:properties>
 </file>
 
-<file path=customXml/itemProps2.xml><?xml version="1.0" encoding="utf-8"?>
-<ds:datastoreItem xmlns:ds="http://schemas.openxmlformats.org/officeDocument/2006/customXml" ds:itemID="{BA719FA4-954C-4FA8-82CB-206659C3B826}">
-  <ds:schemaRefs>
-    <ds:schemaRef ds:uri="http://schemas.microsoft.com/office/2006/metadata/properties"/>
-    <ds:schemaRef ds:uri="http://schemas.microsoft.com/office/infopath/2007/PartnerControls"/>
-    <ds:schemaRef ds:uri="http://schemas.microsoft.com/sharepoint/v3"/>
-    <ds:schemaRef ds:uri="71af3243-3dd4-4a8d-8c0d-dd76da1f02a5"/>
-    <ds:schemaRef ds:uri="230e9df3-be65-4c73-a93b-d1236ebd677e"/>
-  </ds:schemaRefs>
-</ds:datastoreItem>
+<file path=customXml/item3.xml><?xml version="1.0" encoding="utf-8"?>
+<?mso-contentType ?>
+<FormTemplates xmlns="http://schemas.microsoft.com/sharepoint/v3/contenttype/forms">
+  <Display>DocumentLibraryForm</Display>
+  <Edit>DocumentLibraryForm</Edit>
+  <New>DocumentLibraryForm</New>
+</FormTemplates>
 </file>
 
-<file path=customXml/itemProps3.xml><?xml version="1.0" encoding="utf-8"?>
+<file path=customXml/itemProps1.xml><?xml version="1.0" encoding="utf-8"?>
 <ds:datastoreItem xmlns:ds="http://schemas.openxmlformats.org/officeDocument/2006/customXml" ds:itemID="{04948363-B267-4BAC-8655-100FBEC280C1}">
   <ds:schemaRefs>
     <ds:schemaRef ds:uri="http://schemas.microsoft.com/office/2006/metadata/contentType"/>
@@ -20788,6 +20797,26 @@
 </ds:datastoreItem>
 </file>
 
+<file path=customXml/itemProps2.xml><?xml version="1.0" encoding="utf-8"?>
+<ds:datastoreItem xmlns:ds="http://schemas.openxmlformats.org/officeDocument/2006/customXml" ds:itemID="{BA719FA4-954C-4FA8-82CB-206659C3B826}">
+  <ds:schemaRefs>
+    <ds:schemaRef ds:uri="http://schemas.microsoft.com/office/2006/metadata/properties"/>
+    <ds:schemaRef ds:uri="http://schemas.microsoft.com/office/infopath/2007/PartnerControls"/>
+    <ds:schemaRef ds:uri="http://schemas.microsoft.com/sharepoint/v3"/>
+    <ds:schemaRef ds:uri="71af3243-3dd4-4a8d-8c0d-dd76da1f02a5"/>
+    <ds:schemaRef ds:uri="230e9df3-be65-4c73-a93b-d1236ebd677e"/>
+  </ds:schemaRefs>
+</ds:datastoreItem>
+</file>
+
+<file path=customXml/itemProps3.xml><?xml version="1.0" encoding="utf-8"?>
+<ds:datastoreItem xmlns:ds="http://schemas.openxmlformats.org/officeDocument/2006/customXml" ds:itemID="{16DBB56F-4362-4386-A1A1-3DF898896616}">
+  <ds:schemaRefs>
+    <ds:schemaRef ds:uri="http://schemas.microsoft.com/sharepoint/v3/contenttype/forms"/>
+  </ds:schemaRefs>
+</ds:datastoreItem>
+</file>
+
 <file path=docMetadata/LabelInfo.xml><?xml version="1.0" encoding="utf-8"?>
 <clbl:labelList xmlns:clbl="http://schemas.microsoft.com/office/2020/mipLabelMetadata"/>
 </file>
--- a/Dokumentation/Präsentationen/DS_Statusmeeting_1.0.pptx
+++ b/Dokumentation/Präsentationen/DS_Statusmeeting_1.0.pptx
@@ -14,11 +14,11 @@
     <p:sldId id="312" r:id="rId5"/>
     <p:sldId id="331" r:id="rId6"/>
     <p:sldId id="332" r:id="rId7"/>
-    <p:sldId id="333" r:id="rId8"/>
-    <p:sldId id="329" r:id="rId9"/>
-    <p:sldId id="334" r:id="rId10"/>
-    <p:sldId id="282" r:id="rId11"/>
-    <p:sldId id="297" r:id="rId12"/>
+    <p:sldId id="335" r:id="rId8"/>
+    <p:sldId id="333" r:id="rId9"/>
+    <p:sldId id="329" r:id="rId10"/>
+    <p:sldId id="334" r:id="rId11"/>
+    <p:sldId id="282" r:id="rId12"/>
   </p:sldIdLst>
   <p:sldSz cx="12192000" cy="6858000"/>
   <p:notesSz cx="13716000" cy="24384000"/>
@@ -223,6 +223,1089 @@
 <p188:authorLst xmlns:a="http://schemas.openxmlformats.org/drawingml/2006/main" xmlns:r="http://schemas.openxmlformats.org/officeDocument/2006/relationships" xmlns:p188="http://schemas.microsoft.com/office/powerpoint/2018/8/main">
   <p188:author id="{00000000-0000-0000-0000-000000000000}" name="Author" initials="A" userId="Author" providerId="AD"/>
 </p188:authorLst>
+</file>
+
+<file path=ppt/charts/chart1.xml><?xml version="1.0" encoding="utf-8"?>
+<c:chartSpace xmlns:c="http://schemas.openxmlformats.org/drawingml/2006/chart" xmlns:a="http://schemas.openxmlformats.org/drawingml/2006/main" xmlns:r="http://schemas.openxmlformats.org/officeDocument/2006/relationships" xmlns:c16r2="http://schemas.microsoft.com/office/drawing/2015/06/chart">
+  <c:date1904 val="0"/>
+  <c:lang val="en-US"/>
+  <c:roundedCorners val="0"/>
+  <mc:AlternateContent xmlns:mc="http://schemas.openxmlformats.org/markup-compatibility/2006">
+    <mc:Choice xmlns:c14="http://schemas.microsoft.com/office/drawing/2007/8/2/chart" Requires="c14">
+      <c14:style val="102"/>
+    </mc:Choice>
+    <mc:Fallback>
+      <c:style val="2"/>
+    </mc:Fallback>
+  </mc:AlternateContent>
+  <c:chart>
+    <c:autoTitleDeleted val="1"/>
+    <c:plotArea>
+      <c:layout/>
+      <c:pieChart>
+        <c:varyColors val="1"/>
+        <c:ser>
+          <c:idx val="0"/>
+          <c:order val="0"/>
+          <c:tx>
+            <c:strRef>
+              <c:f>Tabelle1!$B$1</c:f>
+              <c:strCache>
+                <c:ptCount val="1"/>
+                <c:pt idx="0">
+                  <c:v>Verkauf</c:v>
+                </c:pt>
+              </c:strCache>
+            </c:strRef>
+          </c:tx>
+          <c:dPt>
+            <c:idx val="0"/>
+            <c:bubble3D val="0"/>
+            <c:spPr>
+              <a:solidFill>
+                <a:schemeClr val="accent1"/>
+              </a:solidFill>
+              <a:ln w="19050">
+                <a:solidFill>
+                  <a:schemeClr val="lt1"/>
+                </a:solidFill>
+              </a:ln>
+              <a:effectLst/>
+            </c:spPr>
+            <c:extLst>
+              <c:ext xmlns:c16="http://schemas.microsoft.com/office/drawing/2014/chart" uri="{C3380CC4-5D6E-409C-BE32-E72D297353CC}">
+                <c16:uniqueId val="{00000001-7F94-4120-9C5B-7559A76FC988}"/>
+              </c:ext>
+            </c:extLst>
+          </c:dPt>
+          <c:dPt>
+            <c:idx val="1"/>
+            <c:bubble3D val="0"/>
+            <c:spPr>
+              <a:solidFill>
+                <a:schemeClr val="accent2"/>
+              </a:solidFill>
+              <a:ln w="19050">
+                <a:solidFill>
+                  <a:schemeClr val="lt1"/>
+                </a:solidFill>
+              </a:ln>
+              <a:effectLst/>
+            </c:spPr>
+            <c:extLst>
+              <c:ext xmlns:c16="http://schemas.microsoft.com/office/drawing/2014/chart" uri="{C3380CC4-5D6E-409C-BE32-E72D297353CC}">
+                <c16:uniqueId val="{00000003-7F94-4120-9C5B-7559A76FC988}"/>
+              </c:ext>
+            </c:extLst>
+          </c:dPt>
+          <c:dPt>
+            <c:idx val="2"/>
+            <c:bubble3D val="0"/>
+            <c:spPr>
+              <a:solidFill>
+                <a:schemeClr val="accent3"/>
+              </a:solidFill>
+              <a:ln w="19050">
+                <a:solidFill>
+                  <a:schemeClr val="lt1"/>
+                </a:solidFill>
+              </a:ln>
+              <a:effectLst/>
+            </c:spPr>
+            <c:extLst>
+              <c:ext xmlns:c16="http://schemas.microsoft.com/office/drawing/2014/chart" uri="{C3380CC4-5D6E-409C-BE32-E72D297353CC}">
+                <c16:uniqueId val="{00000004-7F94-4120-9C5B-7559A76FC988}"/>
+              </c:ext>
+            </c:extLst>
+          </c:dPt>
+          <c:dPt>
+            <c:idx val="3"/>
+            <c:bubble3D val="0"/>
+            <c:spPr>
+              <a:solidFill>
+                <a:schemeClr val="accent4"/>
+              </a:solidFill>
+              <a:ln w="19050">
+                <a:solidFill>
+                  <a:schemeClr val="lt1"/>
+                </a:solidFill>
+              </a:ln>
+              <a:effectLst/>
+            </c:spPr>
+            <c:extLst>
+              <c:ext xmlns:c16="http://schemas.microsoft.com/office/drawing/2014/chart" uri="{C3380CC4-5D6E-409C-BE32-E72D297353CC}">
+                <c16:uniqueId val="{00000002-7F94-4120-9C5B-7559A76FC988}"/>
+              </c:ext>
+            </c:extLst>
+          </c:dPt>
+          <c:dLbls>
+            <c:dLbl>
+              <c:idx val="0"/>
+              <c:tx>
+                <c:rich>
+                  <a:bodyPr rot="0" spcFirstLastPara="1" vertOverflow="ellipsis" vert="horz" wrap="square" lIns="38100" tIns="19050" rIns="38100" bIns="19050" anchor="ctr" anchorCtr="1">
+                    <a:spAutoFit/>
+                  </a:bodyPr>
+                  <a:lstStyle/>
+                  <a:p>
+                    <a:pPr>
+                      <a:defRPr sz="1197" b="0" i="0" u="none" strike="noStrike" kern="1200" baseline="0">
+                        <a:solidFill>
+                          <a:schemeClr val="bg2">
+                            <a:lumMod val="10000"/>
+                          </a:schemeClr>
+                        </a:solidFill>
+                        <a:latin typeface="+mn-lt"/>
+                        <a:ea typeface="+mn-ea"/>
+                        <a:cs typeface="+mn-cs"/>
+                      </a:defRPr>
+                    </a:pPr>
+                    <a:fld id="{2D46CFBC-4C64-429C-A4D6-BE085A72CFD3}" type="PERCENTAGE">
+                      <a:rPr lang="en-US" sz="2000">
+                        <a:solidFill>
+                          <a:schemeClr val="bg2">
+                            <a:lumMod val="10000"/>
+                          </a:schemeClr>
+                        </a:solidFill>
+                      </a:rPr>
+                      <a:pPr>
+                        <a:defRPr>
+                          <a:solidFill>
+                            <a:schemeClr val="bg2">
+                              <a:lumMod val="10000"/>
+                            </a:schemeClr>
+                          </a:solidFill>
+                        </a:defRPr>
+                      </a:pPr>
+                      <a:t>[PERCENTAGE]</a:t>
+                    </a:fld>
+                    <a:endParaRPr lang="de-AT"/>
+                  </a:p>
+                </c:rich>
+              </c:tx>
+              <c:spPr>
+                <a:noFill/>
+                <a:ln>
+                  <a:noFill/>
+                </a:ln>
+                <a:effectLst/>
+              </c:spPr>
+              <c:txPr>
+                <a:bodyPr rot="0" spcFirstLastPara="1" vertOverflow="ellipsis" vert="horz" wrap="square" lIns="38100" tIns="19050" rIns="38100" bIns="19050" anchor="ctr" anchorCtr="1">
+                  <a:spAutoFit/>
+                </a:bodyPr>
+                <a:lstStyle/>
+                <a:p>
+                  <a:pPr>
+                    <a:defRPr sz="1197" b="0" i="0" u="none" strike="noStrike" kern="1200" baseline="0">
+                      <a:solidFill>
+                        <a:schemeClr val="bg2">
+                          <a:lumMod val="10000"/>
+                        </a:schemeClr>
+                      </a:solidFill>
+                      <a:latin typeface="+mn-lt"/>
+                      <a:ea typeface="+mn-ea"/>
+                      <a:cs typeface="+mn-cs"/>
+                    </a:defRPr>
+                  </a:pPr>
+                  <a:endParaRPr lang="de-AT"/>
+                </a:p>
+              </c:txPr>
+              <c:dLblPos val="ctr"/>
+              <c:showLegendKey val="0"/>
+              <c:showVal val="0"/>
+              <c:showCatName val="0"/>
+              <c:showSerName val="0"/>
+              <c:showPercent val="1"/>
+              <c:showBubbleSize val="0"/>
+              <c:extLst>
+                <c:ext xmlns:c15="http://schemas.microsoft.com/office/drawing/2012/chart" uri="{CE6537A1-D6FC-4f65-9D91-7224C49458BB}">
+                  <c15:dlblFieldTable/>
+                  <c15:showDataLabelsRange val="0"/>
+                </c:ext>
+                <c:ext xmlns:c16="http://schemas.microsoft.com/office/drawing/2014/chart" uri="{C3380CC4-5D6E-409C-BE32-E72D297353CC}">
+                  <c16:uniqueId val="{00000001-7F94-4120-9C5B-7559A76FC988}"/>
+                </c:ext>
+              </c:extLst>
+            </c:dLbl>
+            <c:dLbl>
+              <c:idx val="1"/>
+              <c:spPr>
+                <a:noFill/>
+                <a:ln>
+                  <a:noFill/>
+                </a:ln>
+                <a:effectLst/>
+              </c:spPr>
+              <c:txPr>
+                <a:bodyPr rot="0" spcFirstLastPara="1" vertOverflow="ellipsis" vert="horz" wrap="square" lIns="38100" tIns="19050" rIns="38100" bIns="19050" anchor="ctr" anchorCtr="1">
+                  <a:spAutoFit/>
+                </a:bodyPr>
+                <a:lstStyle/>
+                <a:p>
+                  <a:pPr>
+                    <a:defRPr sz="2000" b="0" i="0" u="none" strike="noStrike" kern="1200" baseline="0">
+                      <a:solidFill>
+                        <a:schemeClr val="tx1">
+                          <a:lumMod val="95000"/>
+                          <a:lumOff val="5000"/>
+                        </a:schemeClr>
+                      </a:solidFill>
+                      <a:latin typeface="+mn-lt"/>
+                      <a:ea typeface="+mn-ea"/>
+                      <a:cs typeface="+mn-cs"/>
+                    </a:defRPr>
+                  </a:pPr>
+                  <a:endParaRPr lang="de-DE"/>
+                </a:p>
+              </c:txPr>
+              <c:dLblPos val="ctr"/>
+              <c:showLegendKey val="0"/>
+              <c:showVal val="0"/>
+              <c:showCatName val="0"/>
+              <c:showSerName val="0"/>
+              <c:showPercent val="1"/>
+              <c:showBubbleSize val="0"/>
+              <c:extLst>
+                <c:ext xmlns:c15="http://schemas.microsoft.com/office/drawing/2012/chart" uri="{CE6537A1-D6FC-4f65-9D91-7224C49458BB}"/>
+                <c:ext xmlns:c16="http://schemas.microsoft.com/office/drawing/2014/chart" uri="{C3380CC4-5D6E-409C-BE32-E72D297353CC}">
+                  <c16:uniqueId val="{00000003-7F94-4120-9C5B-7559A76FC988}"/>
+                </c:ext>
+              </c:extLst>
+            </c:dLbl>
+            <c:dLbl>
+              <c:idx val="2"/>
+              <c:spPr>
+                <a:noFill/>
+                <a:ln>
+                  <a:noFill/>
+                </a:ln>
+                <a:effectLst/>
+              </c:spPr>
+              <c:txPr>
+                <a:bodyPr rot="0" spcFirstLastPara="1" vertOverflow="ellipsis" vert="horz" wrap="square" lIns="38100" tIns="19050" rIns="38100" bIns="19050" anchor="ctr" anchorCtr="1">
+                  <a:spAutoFit/>
+                </a:bodyPr>
+                <a:lstStyle/>
+                <a:p>
+                  <a:pPr>
+                    <a:defRPr sz="2000" b="0" i="0" u="none" strike="noStrike" kern="1200" baseline="0">
+                      <a:solidFill>
+                        <a:schemeClr val="tx1">
+                          <a:lumMod val="95000"/>
+                          <a:lumOff val="5000"/>
+                        </a:schemeClr>
+                      </a:solidFill>
+                      <a:latin typeface="+mn-lt"/>
+                      <a:ea typeface="+mn-ea"/>
+                      <a:cs typeface="+mn-cs"/>
+                    </a:defRPr>
+                  </a:pPr>
+                  <a:endParaRPr lang="de-DE"/>
+                </a:p>
+              </c:txPr>
+              <c:dLblPos val="ctr"/>
+              <c:showLegendKey val="0"/>
+              <c:showVal val="0"/>
+              <c:showCatName val="0"/>
+              <c:showSerName val="0"/>
+              <c:showPercent val="1"/>
+              <c:showBubbleSize val="0"/>
+              <c:extLst>
+                <c:ext xmlns:c15="http://schemas.microsoft.com/office/drawing/2012/chart" uri="{CE6537A1-D6FC-4f65-9D91-7224C49458BB}"/>
+                <c:ext xmlns:c16="http://schemas.microsoft.com/office/drawing/2014/chart" uri="{C3380CC4-5D6E-409C-BE32-E72D297353CC}">
+                  <c16:uniqueId val="{00000004-7F94-4120-9C5B-7559A76FC988}"/>
+                </c:ext>
+              </c:extLst>
+            </c:dLbl>
+            <c:dLbl>
+              <c:idx val="3"/>
+              <c:spPr>
+                <a:noFill/>
+                <a:ln>
+                  <a:noFill/>
+                </a:ln>
+                <a:effectLst/>
+              </c:spPr>
+              <c:txPr>
+                <a:bodyPr rot="0" spcFirstLastPara="1" vertOverflow="ellipsis" vert="horz" wrap="square" lIns="38100" tIns="19050" rIns="38100" bIns="19050" anchor="ctr" anchorCtr="1">
+                  <a:spAutoFit/>
+                </a:bodyPr>
+                <a:lstStyle/>
+                <a:p>
+                  <a:pPr>
+                    <a:defRPr sz="2000" b="0" i="0" u="none" strike="noStrike" kern="1200" baseline="0">
+                      <a:solidFill>
+                        <a:schemeClr val="tx1">
+                          <a:lumMod val="95000"/>
+                          <a:lumOff val="5000"/>
+                        </a:schemeClr>
+                      </a:solidFill>
+                      <a:latin typeface="+mn-lt"/>
+                      <a:ea typeface="+mn-ea"/>
+                      <a:cs typeface="+mn-cs"/>
+                    </a:defRPr>
+                  </a:pPr>
+                  <a:endParaRPr lang="de-DE"/>
+                </a:p>
+              </c:txPr>
+              <c:dLblPos val="ctr"/>
+              <c:showLegendKey val="0"/>
+              <c:showVal val="0"/>
+              <c:showCatName val="0"/>
+              <c:showSerName val="0"/>
+              <c:showPercent val="1"/>
+              <c:showBubbleSize val="0"/>
+              <c:extLst>
+                <c:ext xmlns:c15="http://schemas.microsoft.com/office/drawing/2012/chart" uri="{CE6537A1-D6FC-4f65-9D91-7224C49458BB}"/>
+                <c:ext xmlns:c16="http://schemas.microsoft.com/office/drawing/2014/chart" uri="{C3380CC4-5D6E-409C-BE32-E72D297353CC}">
+                  <c16:uniqueId val="{00000002-7F94-4120-9C5B-7559A76FC988}"/>
+                </c:ext>
+              </c:extLst>
+            </c:dLbl>
+            <c:spPr>
+              <a:noFill/>
+              <a:ln>
+                <a:noFill/>
+              </a:ln>
+              <a:effectLst/>
+            </c:spPr>
+            <c:txPr>
+              <a:bodyPr rot="0" spcFirstLastPara="1" vertOverflow="ellipsis" vert="horz" wrap="square" lIns="38100" tIns="19050" rIns="38100" bIns="19050" anchor="ctr" anchorCtr="1">
+                <a:spAutoFit/>
+              </a:bodyPr>
+              <a:lstStyle/>
+              <a:p>
+                <a:pPr>
+                  <a:defRPr sz="1197" b="0" i="0" u="none" strike="noStrike" kern="1200" baseline="0">
+                    <a:solidFill>
+                      <a:schemeClr val="tx1">
+                        <a:lumMod val="75000"/>
+                        <a:lumOff val="25000"/>
+                      </a:schemeClr>
+                    </a:solidFill>
+                    <a:latin typeface="+mn-lt"/>
+                    <a:ea typeface="+mn-ea"/>
+                    <a:cs typeface="+mn-cs"/>
+                  </a:defRPr>
+                </a:pPr>
+                <a:endParaRPr lang="de-DE"/>
+              </a:p>
+            </c:txPr>
+            <c:dLblPos val="ctr"/>
+            <c:showLegendKey val="0"/>
+            <c:showVal val="1"/>
+            <c:showCatName val="0"/>
+            <c:showSerName val="0"/>
+            <c:showPercent val="0"/>
+            <c:showBubbleSize val="0"/>
+            <c:showLeaderLines val="1"/>
+            <c:leaderLines>
+              <c:spPr>
+                <a:ln w="9525" cap="flat" cmpd="sng" algn="ctr">
+                  <a:solidFill>
+                    <a:schemeClr val="tx1">
+                      <a:lumMod val="35000"/>
+                      <a:lumOff val="65000"/>
+                    </a:schemeClr>
+                  </a:solidFill>
+                  <a:round/>
+                </a:ln>
+                <a:effectLst/>
+              </c:spPr>
+            </c:leaderLines>
+            <c:extLst>
+              <c:ext xmlns:c15="http://schemas.microsoft.com/office/drawing/2012/chart" uri="{CE6537A1-D6FC-4f65-9D91-7224C49458BB}"/>
+            </c:extLst>
+          </c:dLbls>
+          <c:cat>
+            <c:strRef>
+              <c:f>Tabelle1!$A$2:$A$5</c:f>
+              <c:strCache>
+                <c:ptCount val="4"/>
+                <c:pt idx="0">
+                  <c:v>Daneil</c:v>
+                </c:pt>
+                <c:pt idx="1">
+                  <c:v>Niklas</c:v>
+                </c:pt>
+                <c:pt idx="2">
+                  <c:v>Christof</c:v>
+                </c:pt>
+                <c:pt idx="3">
+                  <c:v>Eric</c:v>
+                </c:pt>
+              </c:strCache>
+            </c:strRef>
+          </c:cat>
+          <c:val>
+            <c:numRef>
+              <c:f>Tabelle1!$B$2:$B$5</c:f>
+              <c:numCache>
+                <c:formatCode>General</c:formatCode>
+                <c:ptCount val="4"/>
+                <c:pt idx="0">
+                  <c:v>50</c:v>
+                </c:pt>
+                <c:pt idx="1">
+                  <c:v>56</c:v>
+                </c:pt>
+                <c:pt idx="2">
+                  <c:v>62</c:v>
+                </c:pt>
+                <c:pt idx="3">
+                  <c:v>74.5</c:v>
+                </c:pt>
+              </c:numCache>
+            </c:numRef>
+          </c:val>
+          <c:extLst>
+            <c:ext xmlns:c16="http://schemas.microsoft.com/office/drawing/2014/chart" uri="{C3380CC4-5D6E-409C-BE32-E72D297353CC}">
+              <c16:uniqueId val="{00000000-7F94-4120-9C5B-7559A76FC988}"/>
+            </c:ext>
+          </c:extLst>
+        </c:ser>
+        <c:dLbls>
+          <c:showLegendKey val="0"/>
+          <c:showVal val="0"/>
+          <c:showCatName val="0"/>
+          <c:showSerName val="0"/>
+          <c:showPercent val="0"/>
+          <c:showBubbleSize val="0"/>
+          <c:showLeaderLines val="1"/>
+        </c:dLbls>
+        <c:firstSliceAng val="0"/>
+      </c:pieChart>
+      <c:spPr>
+        <a:noFill/>
+        <a:ln>
+          <a:noFill/>
+        </a:ln>
+        <a:effectLst/>
+      </c:spPr>
+    </c:plotArea>
+    <c:legend>
+      <c:legendPos val="b"/>
+      <c:overlay val="0"/>
+      <c:spPr>
+        <a:noFill/>
+        <a:ln>
+          <a:noFill/>
+        </a:ln>
+        <a:effectLst/>
+      </c:spPr>
+      <c:txPr>
+        <a:bodyPr rot="0" spcFirstLastPara="1" vertOverflow="ellipsis" vert="horz" wrap="square" anchor="ctr" anchorCtr="1"/>
+        <a:lstStyle/>
+        <a:p>
+          <a:pPr>
+            <a:defRPr sz="1197" b="0" i="0" u="none" strike="noStrike" kern="1200" baseline="0">
+              <a:solidFill>
+                <a:schemeClr val="tx1">
+                  <a:lumMod val="65000"/>
+                  <a:lumOff val="35000"/>
+                </a:schemeClr>
+              </a:solidFill>
+              <a:latin typeface="+mn-lt"/>
+              <a:ea typeface="+mn-ea"/>
+              <a:cs typeface="+mn-cs"/>
+            </a:defRPr>
+          </a:pPr>
+          <a:endParaRPr lang="de-DE"/>
+        </a:p>
+      </c:txPr>
+    </c:legend>
+    <c:plotVisOnly val="1"/>
+    <c:dispBlanksAs val="gap"/>
+    <c:showDLblsOverMax val="0"/>
+    <c:extLst>
+      <c:ext xmlns:c16r3="http://schemas.microsoft.com/office/drawing/2017/03/chart" uri="{56B9EC1D-385E-4148-901F-78D8002777C0}">
+        <c16r3:dataDisplayOptions16>
+          <c16r3:dispNaAsBlank val="1"/>
+        </c16r3:dataDisplayOptions16>
+      </c:ext>
+    </c:extLst>
+  </c:chart>
+  <c:spPr>
+    <a:noFill/>
+    <a:ln>
+      <a:noFill/>
+    </a:ln>
+    <a:effectLst/>
+  </c:spPr>
+  <c:txPr>
+    <a:bodyPr/>
+    <a:lstStyle/>
+    <a:p>
+      <a:pPr>
+        <a:defRPr/>
+      </a:pPr>
+      <a:endParaRPr lang="de-DE"/>
+    </a:p>
+  </c:txPr>
+  <c:externalData r:id="rId3">
+    <c:autoUpdate val="0"/>
+  </c:externalData>
+</c:chartSpace>
+</file>
+
+<file path=ppt/charts/colors1.xml><?xml version="1.0" encoding="utf-8"?>
+<cs:colorStyle xmlns:cs="http://schemas.microsoft.com/office/drawing/2012/chartStyle" xmlns:a="http://schemas.openxmlformats.org/drawingml/2006/main" meth="cycle" id="10">
+  <a:schemeClr val="accent1"/>
+  <a:schemeClr val="accent2"/>
+  <a:schemeClr val="accent3"/>
+  <a:schemeClr val="accent4"/>
+  <a:schemeClr val="accent5"/>
+  <a:schemeClr val="accent6"/>
+  <cs:variation/>
+  <cs:variation>
+    <a:lumMod val="60000"/>
+  </cs:variation>
+  <cs:variation>
+    <a:lumMod val="80000"/>
+    <a:lumOff val="20000"/>
+  </cs:variation>
+  <cs:variation>
+    <a:lumMod val="80000"/>
+  </cs:variation>
+  <cs:variation>
+    <a:lumMod val="60000"/>
+    <a:lumOff val="40000"/>
+  </cs:variation>
+  <cs:variation>
+    <a:lumMod val="50000"/>
+  </cs:variation>
+  <cs:variation>
+    <a:lumMod val="70000"/>
+    <a:lumOff val="30000"/>
+  </cs:variation>
+  <cs:variation>
+    <a:lumMod val="70000"/>
+  </cs:variation>
+  <cs:variation>
+    <a:lumMod val="50000"/>
+    <a:lumOff val="50000"/>
+  </cs:variation>
+</cs:colorStyle>
+</file>
+
+<file path=ppt/charts/style1.xml><?xml version="1.0" encoding="utf-8"?>
+<cs:chartStyle xmlns:cs="http://schemas.microsoft.com/office/drawing/2012/chartStyle" xmlns:a="http://schemas.openxmlformats.org/drawingml/2006/main" id="251">
+  <cs:axisTitle>
+    <cs:lnRef idx="0"/>
+    <cs:fillRef idx="0"/>
+    <cs:effectRef idx="0"/>
+    <cs:fontRef idx="minor">
+      <a:schemeClr val="tx1">
+        <a:lumMod val="65000"/>
+        <a:lumOff val="35000"/>
+      </a:schemeClr>
+    </cs:fontRef>
+    <cs:defRPr sz="1330" kern="1200"/>
+  </cs:axisTitle>
+  <cs:categoryAxis>
+    <cs:lnRef idx="0"/>
+    <cs:fillRef idx="0"/>
+    <cs:effectRef idx="0"/>
+    <cs:fontRef idx="minor">
+      <a:schemeClr val="tx1">
+        <a:lumMod val="65000"/>
+        <a:lumOff val="35000"/>
+      </a:schemeClr>
+    </cs:fontRef>
+    <cs:spPr>
+      <a:ln w="9525" cap="flat" cmpd="sng" algn="ctr">
+        <a:solidFill>
+          <a:schemeClr val="tx1">
+            <a:lumMod val="15000"/>
+            <a:lumOff val="85000"/>
+          </a:schemeClr>
+        </a:solidFill>
+        <a:round/>
+      </a:ln>
+    </cs:spPr>
+    <cs:defRPr sz="1197" kern="1200"/>
+  </cs:categoryAxis>
+  <cs:chartArea mods="allowNoFillOverride allowNoLineOverride">
+    <cs:lnRef idx="0"/>
+    <cs:fillRef idx="0"/>
+    <cs:effectRef idx="0"/>
+    <cs:fontRef idx="minor">
+      <a:schemeClr val="tx1"/>
+    </cs:fontRef>
+    <cs:spPr>
+      <a:solidFill>
+        <a:schemeClr val="bg1"/>
+      </a:solidFill>
+      <a:ln w="9525" cap="flat" cmpd="sng" algn="ctr">
+        <a:solidFill>
+          <a:schemeClr val="tx1">
+            <a:lumMod val="15000"/>
+            <a:lumOff val="85000"/>
+          </a:schemeClr>
+        </a:solidFill>
+        <a:round/>
+      </a:ln>
+    </cs:spPr>
+    <cs:defRPr sz="1197" kern="1200"/>
+  </cs:chartArea>
+  <cs:dataLabel>
+    <cs:lnRef idx="0"/>
+    <cs:fillRef idx="0"/>
+    <cs:effectRef idx="0"/>
+    <cs:fontRef idx="minor">
+      <a:schemeClr val="tx1">
+        <a:lumMod val="75000"/>
+        <a:lumOff val="25000"/>
+      </a:schemeClr>
+    </cs:fontRef>
+    <cs:defRPr sz="1197" kern="1200"/>
+  </cs:dataLabel>
+  <cs:dataLabelCallout>
+    <cs:lnRef idx="0"/>
+    <cs:fillRef idx="0"/>
+    <cs:effectRef idx="0"/>
+    <cs:fontRef idx="minor">
+      <a:schemeClr val="dk1">
+        <a:lumMod val="65000"/>
+        <a:lumOff val="35000"/>
+      </a:schemeClr>
+    </cs:fontRef>
+    <cs:spPr>
+      <a:solidFill>
+        <a:schemeClr val="lt1"/>
+      </a:solidFill>
+      <a:ln>
+        <a:solidFill>
+          <a:schemeClr val="dk1">
+            <a:lumMod val="25000"/>
+            <a:lumOff val="75000"/>
+          </a:schemeClr>
+        </a:solidFill>
+      </a:ln>
+    </cs:spPr>
+    <cs:defRPr sz="1197" kern="1200"/>
+    <cs:bodyPr rot="0" spcFirstLastPara="1" vertOverflow="clip" horzOverflow="clip" vert="horz" wrap="square" lIns="36576" tIns="18288" rIns="36576" bIns="18288" anchor="ctr" anchorCtr="1">
+      <a:spAutoFit/>
+    </cs:bodyPr>
+  </cs:dataLabelCallout>
+  <cs:dataPoint>
+    <cs:lnRef idx="0"/>
+    <cs:fillRef idx="1">
+      <cs:styleClr val="auto"/>
+    </cs:fillRef>
+    <cs:effectRef idx="0"/>
+    <cs:fontRef idx="minor">
+      <a:schemeClr val="tx1"/>
+    </cs:fontRef>
+    <cs:spPr>
+      <a:ln w="19050">
+        <a:solidFill>
+          <a:schemeClr val="lt1"/>
+        </a:solidFill>
+      </a:ln>
+    </cs:spPr>
+  </cs:dataPoint>
+  <cs:dataPoint3D>
+    <cs:lnRef idx="0"/>
+    <cs:fillRef idx="1">
+      <cs:styleClr val="auto"/>
+    </cs:fillRef>
+    <cs:effectRef idx="0"/>
+    <cs:fontRef idx="minor">
+      <a:schemeClr val="tx1"/>
+    </cs:fontRef>
+    <cs:spPr>
+      <a:ln w="25400">
+        <a:solidFill>
+          <a:schemeClr val="lt1"/>
+        </a:solidFill>
+      </a:ln>
+    </cs:spPr>
+  </cs:dataPoint3D>
+  <cs:dataPointLine>
+    <cs:lnRef idx="0">
+      <cs:styleClr val="auto"/>
+    </cs:lnRef>
+    <cs:fillRef idx="0"/>
+    <cs:effectRef idx="0"/>
+    <cs:fontRef idx="minor">
+      <a:schemeClr val="tx1"/>
+    </cs:fontRef>
+    <cs:spPr>
+      <a:ln w="28575" cap="rnd">
+        <a:solidFill>
+          <a:schemeClr val="phClr"/>
+        </a:solidFill>
+        <a:round/>
+      </a:ln>
+    </cs:spPr>
+  </cs:dataPointLine>
+  <cs:dataPointMarker>
+    <cs:lnRef idx="0">
+      <cs:styleClr val="auto"/>
+    </cs:lnRef>
+    <cs:fillRef idx="1">
+      <cs:styleClr val="auto"/>
+    </cs:fillRef>
+    <cs:effectRef idx="0"/>
+    <cs:fontRef idx="minor">
+      <a:schemeClr val="tx1"/>
+    </cs:fontRef>
+    <cs:spPr>
+      <a:ln w="9525">
+        <a:solidFill>
+          <a:schemeClr val="phClr"/>
+        </a:solidFill>
+      </a:ln>
+    </cs:spPr>
+  </cs:dataPointMarker>
+  <cs:dataPointMarkerLayout symbol="circle" size="5"/>
+  <cs:dataPointWireframe>
+    <cs:lnRef idx="0">
+      <cs:styleClr val="auto"/>
+    </cs:lnRef>
+    <cs:fillRef idx="0"/>
+    <cs:effectRef idx="0"/>
+    <cs:fontRef idx="minor">
+      <a:schemeClr val="tx1"/>
+    </cs:fontRef>
+    <cs:spPr>
+      <a:ln w="9525" cap="rnd">
+        <a:solidFill>
+          <a:schemeClr val="phClr"/>
+        </a:solidFill>
+        <a:round/>
+      </a:ln>
+    </cs:spPr>
+  </cs:dataPointWireframe>
+  <cs:dataTable>
+    <cs:lnRef idx="0"/>
+    <cs:fillRef idx="0"/>
+    <cs:effectRef idx="0"/>
+    <cs:fontRef idx="minor">
+      <a:schemeClr val="tx1">
+        <a:lumMod val="65000"/>
+        <a:lumOff val="35000"/>
+      </a:schemeClr>
+    </cs:fontRef>
+    <cs:spPr>
+      <a:noFill/>
+      <a:ln w="9525" cap="flat" cmpd="sng" algn="ctr">
+        <a:solidFill>
+          <a:schemeClr val="tx1">
+            <a:lumMod val="15000"/>
+            <a:lumOff val="85000"/>
+          </a:schemeClr>
+        </a:solidFill>
+        <a:round/>
+      </a:ln>
+    </cs:spPr>
+    <cs:defRPr sz="1197" kern="1200"/>
+  </cs:dataTable>
+  <cs:downBar>
+    <cs:lnRef idx="0"/>
+    <cs:fillRef idx="0"/>
+    <cs:effectRef idx="0"/>
+    <cs:fontRef idx="minor">
+      <a:schemeClr val="tx1"/>
+    </cs:fontRef>
+    <cs:spPr>
+      <a:solidFill>
+        <a:schemeClr val="dk1">
+          <a:lumMod val="75000"/>
+          <a:lumOff val="25000"/>
+        </a:schemeClr>
+      </a:solidFill>
+      <a:ln w="9525" cap="flat" cmpd="sng" algn="ctr">
+        <a:solidFill>
+          <a:schemeClr val="tx1">
+            <a:lumMod val="65000"/>
+            <a:lumOff val="35000"/>
+          </a:schemeClr>
+        </a:solidFill>
+        <a:round/>
+      </a:ln>
+    </cs:spPr>
+  </cs:downBar>
+  <cs:dropLine>
+    <cs:lnRef idx="0"/>
+    <cs:fillRef idx="0"/>
+    <cs:effectRef idx="0"/>
+    <cs:fontRef idx="minor">
+      <a:schemeClr val="tx1"/>
+    </cs:fontRef>
+    <cs:spPr>
+      <a:ln w="9525" cap="flat" cmpd="sng" algn="ctr">
+        <a:solidFill>
+          <a:schemeClr val="tx1">
+            <a:lumMod val="35000"/>
+            <a:lumOff val="65000"/>
+          </a:schemeClr>
+        </a:solidFill>
+        <a:round/>
+      </a:ln>
+    </cs:spPr>
+  </cs:dropLine>
+  <cs:errorBar>
+    <cs:lnRef idx="0"/>
+    <cs:fillRef idx="0"/>
+    <cs:effectRef idx="0"/>
+    <cs:fontRef idx="minor">
+      <a:schemeClr val="tx1"/>
+    </cs:fontRef>
+    <cs:spPr>
+      <a:ln w="9525" cap="flat" cmpd="sng" algn="ctr">
+        <a:solidFill>
+          <a:schemeClr val="tx1">
+            <a:lumMod val="65000"/>
+            <a:lumOff val="35000"/>
+          </a:schemeClr>
+        </a:solidFill>
+        <a:round/>
+      </a:ln>
+    </cs:spPr>
+  </cs:errorBar>
+  <cs:floor>
+    <cs:lnRef idx="0"/>
+    <cs:fillRef idx="0"/>
+    <cs:effectRef idx="0"/>
+    <cs:fontRef idx="minor">
+      <a:schemeClr val="tx1"/>
+    </cs:fontRef>
+    <cs:spPr>
+      <a:noFill/>
+      <a:ln>
+        <a:noFill/>
+      </a:ln>
+    </cs:spPr>
+  </cs:floor>
+  <cs:gridlineMajor>
+    <cs:lnRef idx="0"/>
+    <cs:fillRef idx="0"/>
+    <cs:effectRef idx="0"/>
+    <cs:fontRef idx="minor">
+      <a:schemeClr val="tx1"/>
+    </cs:fontRef>
+    <cs:spPr>
+      <a:ln w="9525" cap="flat" cmpd="sng" algn="ctr">
+        <a:solidFill>
+          <a:schemeClr val="tx1">
+            <a:lumMod val="15000"/>
+            <a:lumOff val="85000"/>
+          </a:schemeClr>
+        </a:solidFill>
+        <a:round/>
+      </a:ln>
+    </cs:spPr>
+  </cs:gridlineMajor>
+  <cs:gridlineMinor>
+    <cs:lnRef idx="0"/>
+    <cs:fillRef idx="0"/>
+    <cs:effectRef idx="0"/>
+    <cs:fontRef idx="minor">
+      <a:schemeClr val="tx1"/>
+    </cs:fontRef>
+    <cs:spPr>
+      <a:ln w="9525" cap="flat" cmpd="sng" algn="ctr">
+        <a:solidFill>
+          <a:schemeClr val="tx1">
+            <a:lumMod val="5000"/>
+            <a:lumOff val="95000"/>
+          </a:schemeClr>
+        </a:solidFill>
+        <a:round/>
+      </a:ln>
+    </cs:spPr>
+  </cs:gridlineMinor>
+  <cs:hiLoLine>
+    <cs:lnRef idx="0"/>
+    <cs:fillRef idx="0"/>
+    <cs:effectRef idx="0"/>
+    <cs:fontRef idx="minor">
+      <a:schemeClr val="tx1"/>
+    </cs:fontRef>
+    <cs:spPr>
+      <a:ln w="9525" cap="flat" cmpd="sng" algn="ctr">
+        <a:solidFill>
+          <a:schemeClr val="tx1">
+            <a:lumMod val="50000"/>
+            <a:lumOff val="50000"/>
+          </a:schemeClr>
+        </a:solidFill>
+        <a:round/>
+      </a:ln>
+    </cs:spPr>
+  </cs:hiLoLine>
+  <cs:leaderLine>
+    <cs:lnRef idx="0"/>
+    <cs:fillRef idx="0"/>
+    <cs:effectRef idx="0"/>
+    <cs:fontRef idx="minor">
+      <a:schemeClr val="tx1"/>
+    </cs:fontRef>
+    <cs:spPr>
+      <a:ln w="9525" cap="flat" cmpd="sng" algn="ctr">
+        <a:solidFill>
+          <a:schemeClr val="tx1">
+            <a:lumMod val="35000"/>
+            <a:lumOff val="65000"/>
+          </a:schemeClr>
+        </a:solidFill>
+        <a:round/>
+      </a:ln>
+    </cs:spPr>
+  </cs:leaderLine>
+  <cs:legend>
+    <cs:lnRef idx="0"/>
+    <cs:fillRef idx="0"/>
+    <cs:effectRef idx="0"/>
+    <cs:fontRef idx="minor">
+      <a:schemeClr val="tx1">
+        <a:lumMod val="65000"/>
+        <a:lumOff val="35000"/>
+      </a:schemeClr>
+    </cs:fontRef>
+    <cs:defRPr sz="1197" kern="1200"/>
+  </cs:legend>
+  <cs:plotArea mods="allowNoFillOverride allowNoLineOverride">
+    <cs:lnRef idx="0"/>
+    <cs:fillRef idx="0"/>
+    <cs:effectRef idx="0"/>
+    <cs:fontRef idx="minor">
+      <a:schemeClr val="tx1"/>
+    </cs:fontRef>
+  </cs:plotArea>
+  <cs:plotArea3D mods="allowNoFillOverride allowNoLineOverride">
+    <cs:lnRef idx="0"/>
+    <cs:fillRef idx="0"/>
+    <cs:effectRef idx="0"/>
+    <cs:fontRef idx="minor">
+      <a:schemeClr val="tx1"/>
+    </cs:fontRef>
+  </cs:plotArea3D>
+  <cs:seriesAxis>
+    <cs:lnRef idx="0"/>
+    <cs:fillRef idx="0"/>
+    <cs:effectRef idx="0"/>
+    <cs:fontRef idx="minor">
+      <a:schemeClr val="tx1">
+        <a:lumMod val="65000"/>
+        <a:lumOff val="35000"/>
+      </a:schemeClr>
+    </cs:fontRef>
+    <cs:defRPr sz="1197" kern="1200"/>
+  </cs:seriesAxis>
+  <cs:seriesLine>
+    <cs:lnRef idx="0"/>
+    <cs:fillRef idx="0"/>
+    <cs:effectRef idx="0"/>
+    <cs:fontRef idx="minor">
+      <a:schemeClr val="tx1"/>
+    </cs:fontRef>
+    <cs:spPr>
+      <a:ln w="9525" cap="flat" cmpd="sng" algn="ctr">
+        <a:solidFill>
+          <a:schemeClr val="tx1">
+            <a:lumMod val="35000"/>
+            <a:lumOff val="65000"/>
+          </a:schemeClr>
+        </a:solidFill>
+        <a:round/>
+      </a:ln>
+    </cs:spPr>
+  </cs:seriesLine>
+  <cs:title>
+    <cs:lnRef idx="0"/>
+    <cs:fillRef idx="0"/>
+    <cs:effectRef idx="0"/>
+    <cs:fontRef idx="minor">
+      <a:schemeClr val="tx1">
+        <a:lumMod val="65000"/>
+        <a:lumOff val="35000"/>
+      </a:schemeClr>
+    </cs:fontRef>
+    <cs:defRPr sz="1862" b="0" kern="1200" spc="0" baseline="0"/>
+  </cs:title>
+  <cs:trendline>
+    <cs:lnRef idx="0">
+      <cs:styleClr val="auto"/>
+    </cs:lnRef>
+    <cs:fillRef idx="0"/>
+    <cs:effectRef idx="0"/>
+    <cs:fontRef idx="minor">
+      <a:schemeClr val="tx1"/>
+    </cs:fontRef>
+    <cs:spPr>
+      <a:ln w="19050" cap="rnd">
+        <a:solidFill>
+          <a:schemeClr val="phClr"/>
+        </a:solidFill>
+        <a:prstDash val="sysDot"/>
+      </a:ln>
+    </cs:spPr>
+  </cs:trendline>
+  <cs:trendlineLabel>
+    <cs:lnRef idx="0"/>
+    <cs:fillRef idx="0"/>
+    <cs:effectRef idx="0"/>
+    <cs:fontRef idx="minor">
+      <a:schemeClr val="tx1">
+        <a:lumMod val="65000"/>
+        <a:lumOff val="35000"/>
+      </a:schemeClr>
+    </cs:fontRef>
+    <cs:defRPr sz="1197" kern="1200"/>
+  </cs:trendlineLabel>
+  <cs:upBar>
+    <cs:lnRef idx="0"/>
+    <cs:fillRef idx="0"/>
+    <cs:effectRef idx="0"/>
+    <cs:fontRef idx="minor">
+      <a:schemeClr val="tx1"/>
+    </cs:fontRef>
+    <cs:spPr>
+      <a:solidFill>
+        <a:schemeClr val="lt1"/>
+      </a:solidFill>
+      <a:ln w="9525" cap="flat" cmpd="sng" algn="ctr">
+        <a:solidFill>
+          <a:schemeClr val="tx1">
+            <a:lumMod val="65000"/>
+            <a:lumOff val="35000"/>
+          </a:schemeClr>
+        </a:solidFill>
+        <a:round/>
+      </a:ln>
+    </cs:spPr>
+  </cs:upBar>
+  <cs:valueAxis>
+    <cs:lnRef idx="0"/>
+    <cs:fillRef idx="0"/>
+    <cs:effectRef idx="0"/>
+    <cs:fontRef idx="minor">
+      <a:schemeClr val="tx1">
+        <a:lumMod val="65000"/>
+        <a:lumOff val="35000"/>
+      </a:schemeClr>
+    </cs:fontRef>
+    <cs:defRPr sz="1197" kern="1200"/>
+  </cs:valueAxis>
+  <cs:wall>
+    <cs:lnRef idx="0"/>
+    <cs:fillRef idx="0"/>
+    <cs:effectRef idx="0"/>
+    <cs:fontRef idx="minor">
+      <a:schemeClr val="tx1"/>
+    </cs:fontRef>
+    <cs:spPr>
+      <a:noFill/>
+      <a:ln>
+        <a:noFill/>
+      </a:ln>
+    </cs:spPr>
+  </cs:wall>
+</cs:chartStyle>
 </file>
 
 <file path=ppt/handoutMasters/handoutMaster1.xml><?xml version="1.0" encoding="utf-8"?>
@@ -864,101 +1947,6 @@
     <p:extLst>
       <p:ext uri="{BB962C8B-B14F-4D97-AF65-F5344CB8AC3E}">
         <p14:creationId xmlns:p14="http://schemas.microsoft.com/office/powerpoint/2010/main" val="1019397722"/>
-      </p:ext>
-    </p:extLst>
-  </p:cSld>
-  <p:clrMapOvr>
-    <a:masterClrMapping/>
-  </p:clrMapOvr>
-</p:notes>
-</file>
-
-<file path=ppt/notesSlides/notesSlide4.xml><?xml version="1.0" encoding="utf-8"?>
-<p:notes xmlns:a="http://schemas.openxmlformats.org/drawingml/2006/main" xmlns:r="http://schemas.openxmlformats.org/officeDocument/2006/relationships" xmlns:p="http://schemas.openxmlformats.org/presentationml/2006/main">
-  <p:cSld>
-    <p:spTree>
-      <p:nvGrpSpPr>
-        <p:cNvPr id="1" name=""/>
-        <p:cNvGrpSpPr/>
-        <p:nvPr/>
-      </p:nvGrpSpPr>
-      <p:grpSpPr>
-        <a:xfrm>
-          <a:off x="0" y="0"/>
-          <a:ext cx="0" cy="0"/>
-          <a:chOff x="0" y="0"/>
-          <a:chExt cx="0" cy="0"/>
-        </a:xfrm>
-      </p:grpSpPr>
-      <p:sp>
-        <p:nvSpPr>
-          <p:cNvPr id="2" name="Folienbildplatzhalter 1"/>
-          <p:cNvSpPr>
-            <a:spLocks noGrp="1" noRot="1" noChangeAspect="1"/>
-          </p:cNvSpPr>
-          <p:nvPr>
-            <p:ph type="sldImg"/>
-          </p:nvPr>
-        </p:nvSpPr>
-        <p:spPr>
-          <a:xfrm>
-            <a:off x="-457200" y="3048000"/>
-            <a:ext cx="14630400" cy="8229600"/>
-          </a:xfrm>
-          <a:prstGeom prst="rect">
-            <a:avLst/>
-          </a:prstGeom>
-          <a:noFill/>
-          <a:ln w="12700">
-            <a:solidFill>
-              <a:prstClr val="black"/>
-            </a:solidFill>
-          </a:ln>
-        </p:spPr>
-        <p:txBody>
-          <a:bodyPr/>
-          <a:lstStyle/>
-          <a:p>
-            <a:endParaRPr lang="de-AT"/>
-          </a:p>
-        </p:txBody>
-      </p:sp>
-      <p:sp>
-        <p:nvSpPr>
-          <p:cNvPr id="3" name="Notizenplatzhalter 2"/>
-          <p:cNvSpPr>
-            <a:spLocks noGrp="1"/>
-          </p:cNvSpPr>
-          <p:nvPr>
-            <p:ph type="body" idx="1"/>
-          </p:nvPr>
-        </p:nvSpPr>
-        <p:spPr>
-          <a:xfrm>
-            <a:off x="1371600" y="11734800"/>
-            <a:ext cx="10972800" cy="9601200"/>
-          </a:xfrm>
-          <a:prstGeom prst="rect">
-            <a:avLst/>
-          </a:prstGeom>
-        </p:spPr>
-        <p:txBody>
-          <a:bodyPr rtlCol="0"/>
-          <a:lstStyle>
-            <a:defPPr>
-              <a:defRPr lang="de-DE"/>
-            </a:defPPr>
-          </a:lstStyle>
-          <a:p>
-            <a:pPr rtl="0"/>
-            <a:endParaRPr lang="de-DE" dirty="0"/>
-          </a:p>
-        </p:txBody>
-      </p:sp>
-    </p:spTree>
-    <p:extLst>
-      <p:ext uri="{BB962C8B-B14F-4D97-AF65-F5344CB8AC3E}">
-        <p14:creationId xmlns:p14="http://schemas.microsoft.com/office/powerpoint/2010/main" val="931307476"/>
       </p:ext>
     </p:extLst>
   </p:cSld>
@@ -18173,11 +19161,11 @@
             </a:r>
             <a:r>
               <a:rPr lang="de-DE" dirty="0"/>
-              <a:t> – </a:t>
+              <a:t> </a:t>
             </a:r>
             <a:r>
-              <a:rPr lang="de-DE" dirty="0" err="1"/>
-              <a:t>ferig</a:t>
+              <a:rPr lang="de-DE"/>
+              <a:t>– fertig</a:t>
             </a:r>
             <a:endParaRPr lang="de-DE" dirty="0"/>
           </a:p>
@@ -18497,6 +19485,165 @@
       </p:grpSpPr>
       <p:sp>
         <p:nvSpPr>
+          <p:cNvPr id="2" name="Titel 1">
+            <a:extLst>
+              <a:ext uri="{FF2B5EF4-FFF2-40B4-BE49-F238E27FC236}">
+                <a16:creationId xmlns:a16="http://schemas.microsoft.com/office/drawing/2014/main" id="{84708D48-D8BC-B095-1FE6-A2EF88B41F12}"/>
+              </a:ext>
+            </a:extLst>
+          </p:cNvPr>
+          <p:cNvSpPr>
+            <a:spLocks noGrp="1"/>
+          </p:cNvSpPr>
+          <p:nvPr>
+            <p:ph type="title"/>
+          </p:nvPr>
+        </p:nvSpPr>
+        <p:spPr/>
+        <p:txBody>
+          <a:bodyPr/>
+          <a:lstStyle/>
+          <a:p>
+            <a:r>
+              <a:rPr lang="de-DE" dirty="0" err="1"/>
+              <a:t>ArbeitsZeit</a:t>
+            </a:r>
+            <a:endParaRPr lang="de-AT" dirty="0"/>
+          </a:p>
+        </p:txBody>
+      </p:sp>
+      <p:sp>
+        <p:nvSpPr>
+          <p:cNvPr id="3" name="Inhaltsplatzhalter 2">
+            <a:extLst>
+              <a:ext uri="{FF2B5EF4-FFF2-40B4-BE49-F238E27FC236}">
+                <a16:creationId xmlns:a16="http://schemas.microsoft.com/office/drawing/2014/main" id="{A80ACFC2-D775-B32C-026F-411F4162045A}"/>
+              </a:ext>
+            </a:extLst>
+          </p:cNvPr>
+          <p:cNvSpPr>
+            <a:spLocks noGrp="1"/>
+          </p:cNvSpPr>
+          <p:nvPr>
+            <p:ph sz="half" idx="2"/>
+          </p:nvPr>
+        </p:nvSpPr>
+        <p:spPr/>
+        <p:txBody>
+          <a:bodyPr/>
+          <a:lstStyle/>
+          <a:p>
+            <a:r>
+              <a:rPr lang="de-DE" dirty="0"/>
+              <a:t>Daniel: 50h</a:t>
+            </a:r>
+          </a:p>
+          <a:p>
+            <a:r>
+              <a:rPr lang="de-DE" dirty="0"/>
+              <a:t>Niklas: 56h</a:t>
+            </a:r>
+          </a:p>
+          <a:p>
+            <a:r>
+              <a:rPr lang="de-DE" dirty="0"/>
+              <a:t>Christof: 62h</a:t>
+            </a:r>
+          </a:p>
+          <a:p>
+            <a:r>
+              <a:rPr lang="de-DE" dirty="0"/>
+              <a:t>Eric: 74,5h</a:t>
+            </a:r>
+            <a:endParaRPr lang="de-AT" dirty="0"/>
+          </a:p>
+        </p:txBody>
+      </p:sp>
+      <p:sp>
+        <p:nvSpPr>
+          <p:cNvPr id="4" name="Foliennummernplatzhalter 3">
+            <a:extLst>
+              <a:ext uri="{FF2B5EF4-FFF2-40B4-BE49-F238E27FC236}">
+                <a16:creationId xmlns:a16="http://schemas.microsoft.com/office/drawing/2014/main" id="{182A30DD-6EE9-176E-DFF7-5C1F1B3639BA}"/>
+              </a:ext>
+            </a:extLst>
+          </p:cNvPr>
+          <p:cNvSpPr>
+            <a:spLocks noGrp="1"/>
+          </p:cNvSpPr>
+          <p:nvPr>
+            <p:ph type="sldNum" sz="quarter" idx="10"/>
+          </p:nvPr>
+        </p:nvSpPr>
+        <p:spPr/>
+        <p:txBody>
+          <a:bodyPr/>
+          <a:lstStyle/>
+          <a:p>
+            <a:pPr rtl="0"/>
+            <a:fld id="{48F63A3B-78C7-47BE-AE5E-E10140E04643}" type="slidenum">
+              <a:rPr lang="de-DE" smtClean="0"/>
+              <a:pPr rtl="0"/>
+              <a:t>4</a:t>
+            </a:fld>
+            <a:endParaRPr lang="de-DE" dirty="0"/>
+          </a:p>
+        </p:txBody>
+      </p:sp>
+      <p:graphicFrame>
+        <p:nvGraphicFramePr>
+          <p:cNvPr id="7" name="Diagramm 6">
+            <a:extLst>
+              <a:ext uri="{FF2B5EF4-FFF2-40B4-BE49-F238E27FC236}">
+                <a16:creationId xmlns:a16="http://schemas.microsoft.com/office/drawing/2014/main" id="{D9EAC307-9B8B-8FC9-9B27-5712D80BF80A}"/>
+              </a:ext>
+            </a:extLst>
+          </p:cNvPr>
+          <p:cNvGraphicFramePr/>
+          <p:nvPr/>
+        </p:nvGraphicFramePr>
+        <p:xfrm>
+          <a:off x="7334053" y="719666"/>
+          <a:ext cx="3629319" cy="5483171"/>
+        </p:xfrm>
+        <a:graphic>
+          <a:graphicData uri="http://schemas.openxmlformats.org/drawingml/2006/chart">
+            <c:chart xmlns:c="http://schemas.openxmlformats.org/drawingml/2006/chart" xmlns:r="http://schemas.openxmlformats.org/officeDocument/2006/relationships" r:id="rId2"/>
+          </a:graphicData>
+        </a:graphic>
+      </p:graphicFrame>
+    </p:spTree>
+    <p:extLst>
+      <p:ext uri="{BB962C8B-B14F-4D97-AF65-F5344CB8AC3E}">
+        <p14:creationId xmlns:p14="http://schemas.microsoft.com/office/powerpoint/2010/main" val="1742361499"/>
+      </p:ext>
+    </p:extLst>
+  </p:cSld>
+  <p:clrMapOvr>
+    <a:masterClrMapping/>
+  </p:clrMapOvr>
+</p:sld>
+</file>
+
+<file path=ppt/slides/slide5.xml><?xml version="1.0" encoding="utf-8"?>
+<p:sld xmlns:a="http://schemas.openxmlformats.org/drawingml/2006/main" xmlns:r="http://schemas.openxmlformats.org/officeDocument/2006/relationships" xmlns:p="http://schemas.openxmlformats.org/presentationml/2006/main">
+  <p:cSld>
+    <p:spTree>
+      <p:nvGrpSpPr>
+        <p:cNvPr id="1" name=""/>
+        <p:cNvGrpSpPr/>
+        <p:nvPr/>
+      </p:nvGrpSpPr>
+      <p:grpSpPr>
+        <a:xfrm>
+          <a:off x="0" y="0"/>
+          <a:ext cx="0" cy="0"/>
+          <a:chOff x="0" y="0"/>
+          <a:chExt cx="0" cy="0"/>
+        </a:xfrm>
+      </p:grpSpPr>
+      <p:sp>
+        <p:nvSpPr>
           <p:cNvPr id="4" name="Foliennummernplatzhalter 3"/>
           <p:cNvSpPr>
             <a:spLocks noGrp="1"/>
@@ -18517,7 +19664,7 @@
           <a:p>
             <a:fld id="{48F63A3B-78C7-47BE-AE5E-E10140E04643}" type="slidenum">
               <a:rPr lang="de-DE" smtClean="0"/>
-              <a:t>4</a:t>
+              <a:t>5</a:t>
             </a:fld>
             <a:endParaRPr lang="de-DE"/>
           </a:p>
@@ -18703,7 +19850,7 @@
 </p:sld>
 </file>
 
-<file path=ppt/slides/slide5.xml><?xml version="1.0" encoding="utf-8"?>
+<file path=ppt/slides/slide6.xml><?xml version="1.0" encoding="utf-8"?>
 <p:sld xmlns:a="http://schemas.openxmlformats.org/drawingml/2006/main" xmlns:r="http://schemas.openxmlformats.org/officeDocument/2006/relationships" xmlns:p="http://schemas.openxmlformats.org/presentationml/2006/main">
   <p:cSld>
     <p:spTree>
@@ -18760,7 +19907,7 @@
             <a:fld id="{48F63A3B-78C7-47BE-AE5E-E10140E04643}" type="slidenum">
               <a:rPr lang="de-DE" smtClean="0"/>
               <a:pPr rtl="0"/>
-              <a:t>5</a:t>
+              <a:t>6</a:t>
             </a:fld>
             <a:endParaRPr lang="de-DE" dirty="0"/>
           </a:p>
@@ -19135,7 +20282,7 @@
 </p:sld>
 </file>
 
-<file path=ppt/slides/slide6.xml><?xml version="1.0" encoding="utf-8"?>
+<file path=ppt/slides/slide7.xml><?xml version="1.0" encoding="utf-8"?>
 <p:sld xmlns:a="http://schemas.openxmlformats.org/drawingml/2006/main" xmlns:r="http://schemas.openxmlformats.org/officeDocument/2006/relationships" xmlns:p="http://schemas.openxmlformats.org/presentationml/2006/main">
   <p:cSld>
     <p:spTree>
@@ -19174,7 +20321,7 @@
           <a:p>
             <a:fld id="{48F63A3B-78C7-47BE-AE5E-E10140E04643}" type="slidenum">
               <a:rPr lang="de-DE" smtClean="0"/>
-              <a:t>6</a:t>
+              <a:t>7</a:t>
             </a:fld>
             <a:endParaRPr lang="de-DE"/>
           </a:p>
@@ -19293,7 +20440,7 @@
 </p:sld>
 </file>
 
-<file path=ppt/slides/slide7.xml><?xml version="1.0" encoding="utf-8"?>
+<file path=ppt/slides/slide8.xml><?xml version="1.0" encoding="utf-8"?>
 <p:sld xmlns:a="http://schemas.openxmlformats.org/drawingml/2006/main" xmlns:r="http://schemas.openxmlformats.org/officeDocument/2006/relationships" xmlns:p="http://schemas.openxmlformats.org/presentationml/2006/main">
   <p:cSld>
     <p:spTree>
@@ -19461,7 +20608,7 @@
             <a:fld id="{48F63A3B-78C7-47BE-AE5E-E10140E04643}" type="slidenum">
               <a:rPr lang="de-DE" smtClean="0"/>
               <a:pPr rtl="0"/>
-              <a:t>7</a:t>
+              <a:t>8</a:t>
             </a:fld>
             <a:endParaRPr lang="de-DE" dirty="0"/>
           </a:p>
@@ -19543,86 +20690,6 @@
     <p:extLst>
       <p:ext uri="{BB962C8B-B14F-4D97-AF65-F5344CB8AC3E}">
         <p14:creationId xmlns:p14="http://schemas.microsoft.com/office/powerpoint/2010/main" val="685681062"/>
-      </p:ext>
-    </p:extLst>
-  </p:cSld>
-  <p:clrMapOvr>
-    <a:masterClrMapping/>
-  </p:clrMapOvr>
-  <mc:AlternateContent xmlns:mc="http://schemas.openxmlformats.org/markup-compatibility/2006" xmlns:p159="http://schemas.microsoft.com/office/powerpoint/2015/09/main">
-    <mc:Choice Requires="p159">
-      <p:transition xmlns:p14="http://schemas.microsoft.com/office/powerpoint/2010/main" spd="slow" p14:dur="2000">
-        <p159:morph option="byObject"/>
-      </p:transition>
-    </mc:Choice>
-    <mc:Fallback xmlns="">
-      <p:transition spd="slow">
-        <p:fade/>
-      </p:transition>
-    </mc:Fallback>
-  </mc:AlternateContent>
-</p:sld>
-</file>
-
-<file path=ppt/slides/slide8.xml><?xml version="1.0" encoding="utf-8"?>
-<p:sld xmlns:a="http://schemas.openxmlformats.org/drawingml/2006/main" xmlns:r="http://schemas.openxmlformats.org/officeDocument/2006/relationships" xmlns:p="http://schemas.openxmlformats.org/presentationml/2006/main">
-  <p:cSld>
-    <p:spTree>
-      <p:nvGrpSpPr>
-        <p:cNvPr id="1" name=""/>
-        <p:cNvGrpSpPr/>
-        <p:nvPr/>
-      </p:nvGrpSpPr>
-      <p:grpSpPr>
-        <a:xfrm>
-          <a:off x="0" y="0"/>
-          <a:ext cx="0" cy="0"/>
-          <a:chOff x="0" y="0"/>
-          <a:chExt cx="0" cy="0"/>
-        </a:xfrm>
-      </p:grpSpPr>
-      <p:sp>
-        <p:nvSpPr>
-          <p:cNvPr id="2" name="Titel 1">
-            <a:extLst>
-              <a:ext uri="{FF2B5EF4-FFF2-40B4-BE49-F238E27FC236}">
-                <a16:creationId xmlns:a16="http://schemas.microsoft.com/office/drawing/2014/main" id="{509D22C5-0C9E-B582-A8FE-B45E70A01E7F}"/>
-              </a:ext>
-            </a:extLst>
-          </p:cNvPr>
-          <p:cNvSpPr>
-            <a:spLocks noGrp="1"/>
-          </p:cNvSpPr>
-          <p:nvPr>
-            <p:ph type="ctrTitle"/>
-          </p:nvPr>
-        </p:nvSpPr>
-        <p:spPr>
-          <a:xfrm>
-            <a:off x="914400" y="849782"/>
-            <a:ext cx="4455885" cy="2727709"/>
-          </a:xfrm>
-        </p:spPr>
-        <p:txBody>
-          <a:bodyPr rtlCol="0"/>
-          <a:lstStyle>
-            <a:defPPr>
-              <a:defRPr lang="de-DE"/>
-            </a:defPPr>
-          </a:lstStyle>
-          <a:p>
-            <a:pPr rtl="0"/>
-            <a:r>
-              <a:rPr lang="de-DE" dirty="0"/>
-              <a:t>Vielen Dank</a:t>
-            </a:r>
-          </a:p>
-        </p:txBody>
-      </p:sp>
-    </p:spTree>
-    <p:extLst>
-      <p:ext uri="{BB962C8B-B14F-4D97-AF65-F5344CB8AC3E}">
-        <p14:creationId xmlns:p14="http://schemas.microsoft.com/office/powerpoint/2010/main" val="1973173046"/>
       </p:ext>
     </p:extLst>
   </p:cSld>
